--- a/media/resources/files/EkiOrunduuOnduktarKoshuu3Tutashtyr.pptx
+++ b/media/resources/files/EkiOrunduuOnduktarKoshuu3Tutashtyr.pptx
@@ -7364,7 +7364,7 @@
                 <a:ea typeface="+mn-ea"/>
                 <a:cs typeface="+mn-cs"/>
               </a:rPr>
-              <a:t>Ошол команда үчүн квадратты талап кылуу үчүн жооп кутучасынын тиешелүү көлөкө тарабын чыкылдатыңыз/тийиңиз.</a:t>
+              <a:t>Ошол команданын квадратын ээлөө үчүн жооп кутучасынын боёлгон бөлүгүн басыңыз.</a:t>
             </a:r>
           </a:p>
           <a:p>
@@ -7997,7 +7997,7 @@
                             <a:schemeClr val="tx1"/>
                           </a:solidFill>
                         </a:rPr>
-                        <a:t>3.91</a:t>
+                        <a:t>3,91</a:t>
                       </a:r>
                     </a:p>
                   </a:txBody>
@@ -8069,7 +8069,7 @@
                             <a:schemeClr val="tx1"/>
                           </a:solidFill>
                         </a:rPr>
-                        <a:t>6.15</a:t>
+                        <a:t>6,15</a:t>
                       </a:r>
                     </a:p>
                   </a:txBody>
@@ -8141,7 +8141,7 @@
                             <a:schemeClr val="tx1"/>
                           </a:solidFill>
                         </a:rPr>
-                        <a:t>4.47</a:t>
+                        <a:t>4,47</a:t>
                       </a:r>
                     </a:p>
                   </a:txBody>
@@ -8197,7 +8197,7 @@
                             <a:schemeClr val="tx1"/>
                           </a:solidFill>
                         </a:rPr>
-                        <a:t>3.92</a:t>
+                        <a:t>3,92</a:t>
                       </a:r>
                     </a:p>
                   </a:txBody>
@@ -8260,7 +8260,7 @@
                             <a:schemeClr val="tx1"/>
                           </a:solidFill>
                         </a:rPr>
-                        <a:t>3.61</a:t>
+                        <a:t>3,61</a:t>
                       </a:r>
                     </a:p>
                   </a:txBody>
@@ -8316,7 +8316,7 @@
                             <a:schemeClr val="tx1"/>
                           </a:solidFill>
                         </a:rPr>
-                        <a:t>4.36</a:t>
+                        <a:t>4,36</a:t>
                       </a:r>
                     </a:p>
                   </a:txBody>
@@ -8388,7 +8388,7 @@
                             <a:schemeClr val="tx1"/>
                           </a:solidFill>
                         </a:rPr>
-                        <a:t>7.06</a:t>
+                        <a:t>7,06</a:t>
                       </a:r>
                     </a:p>
                   </a:txBody>
@@ -8444,7 +8444,7 @@
                             <a:schemeClr val="tx1"/>
                           </a:solidFill>
                         </a:rPr>
-                        <a:t>7.93</a:t>
+                        <a:t>7,93</a:t>
                       </a:r>
                     </a:p>
                   </a:txBody>
@@ -8507,7 +8507,7 @@
                             <a:schemeClr val="tx1"/>
                           </a:solidFill>
                         </a:rPr>
-                        <a:t>7.96</a:t>
+                        <a:t>7,96</a:t>
                       </a:r>
                     </a:p>
                   </a:txBody>
@@ -8563,7 +8563,7 @@
                             <a:schemeClr val="tx1"/>
                           </a:solidFill>
                         </a:rPr>
-                        <a:t>3.96</a:t>
+                        <a:t>3,96</a:t>
                       </a:r>
                     </a:p>
                   </a:txBody>
@@ -8635,7 +8635,7 @@
                             <a:schemeClr val="tx1"/>
                           </a:solidFill>
                         </a:rPr>
-                        <a:t>4.71</a:t>
+                        <a:t>4,71</a:t>
                       </a:r>
                     </a:p>
                   </a:txBody>
@@ -8691,7 +8691,7 @@
                             <a:schemeClr val="tx1"/>
                           </a:solidFill>
                         </a:rPr>
-                        <a:t>6.21</a:t>
+                        <a:t>6,21</a:t>
                       </a:r>
                     </a:p>
                   </a:txBody>
@@ -8754,7 +8754,7 @@
                             <a:schemeClr val="tx1"/>
                           </a:solidFill>
                         </a:rPr>
-                        <a:t>2.38</a:t>
+                        <a:t>2,38</a:t>
                       </a:r>
                     </a:p>
                   </a:txBody>
@@ -8810,7 +8810,7 @@
                             <a:schemeClr val="tx1"/>
                           </a:solidFill>
                         </a:rPr>
-                        <a:t>7.04</a:t>
+                        <a:t>7,04</a:t>
                       </a:r>
                     </a:p>
                   </a:txBody>
@@ -8882,7 +8882,7 @@
                             <a:schemeClr val="tx1"/>
                           </a:solidFill>
                         </a:rPr>
-                        <a:t>5.58</a:t>
+                        <a:t>5,58</a:t>
                       </a:r>
                     </a:p>
                   </a:txBody>
@@ -8938,7 +8938,7 @@
                             <a:schemeClr val="tx1"/>
                           </a:solidFill>
                         </a:rPr>
-                        <a:t>3.62</a:t>
+                        <a:t>3,62</a:t>
                       </a:r>
                     </a:p>
                   </a:txBody>
@@ -9507,7 +9507,7 @@
                           <a:latin typeface="Arial" panose="020B0604020202020204" pitchFamily="34" charset="0"/>
                           <a:cs typeface="Arial" panose="020B0604020202020204" pitchFamily="34" charset="0"/>
                         </a:rPr>
-                        <a:t>2.31 + 2.4</a:t>
+                        <a:t>2,31 + 2,4</a:t>
                       </a:r>
                     </a:p>
                   </a:txBody>
@@ -9564,7 +9564,7 @@
                           <a:latin typeface="Arial" panose="020B0604020202020204" pitchFamily="34" charset="0"/>
                           <a:cs typeface="Arial" panose="020B0604020202020204" pitchFamily="34" charset="0"/>
                         </a:rPr>
-                        <a:t>4.56 + 3.4</a:t>
+                        <a:t>4,56 + 3,4</a:t>
                       </a:r>
                     </a:p>
                   </a:txBody>
@@ -9628,7 +9628,7 @@
                           <a:latin typeface="Arial" panose="020B0604020202020204" pitchFamily="34" charset="0"/>
                           <a:cs typeface="Arial" panose="020B0604020202020204" pitchFamily="34" charset="0"/>
                         </a:rPr>
-                        <a:t> 4.3 + 1.28</a:t>
+                        <a:t> 4,3 + 1,28</a:t>
                       </a:r>
                     </a:p>
                   </a:txBody>
@@ -9685,7 +9685,7 @@
                           <a:latin typeface="Arial" panose="020B0604020202020204" pitchFamily="34" charset="0"/>
                           <a:cs typeface="Arial" panose="020B0604020202020204" pitchFamily="34" charset="0"/>
                         </a:rPr>
-                        <a:t>0.82 + 2.8</a:t>
+                        <a:t>0,82 + 2,8</a:t>
                       </a:r>
                     </a:p>
                   </a:txBody>
@@ -9749,7 +9749,7 @@
                           <a:latin typeface="Arial" panose="020B0604020202020204" pitchFamily="34" charset="0"/>
                           <a:cs typeface="Arial" panose="020B0604020202020204" pitchFamily="34" charset="0"/>
                         </a:rPr>
-                        <a:t>0.7 + 1.68</a:t>
+                        <a:t>0,7 + 1,68</a:t>
                       </a:r>
                     </a:p>
                   </a:txBody>
@@ -9806,7 +9806,7 @@
                           <a:latin typeface="Arial" panose="020B0604020202020204" pitchFamily="34" charset="0"/>
                           <a:cs typeface="Arial" panose="020B0604020202020204" pitchFamily="34" charset="0"/>
                         </a:rPr>
-                        <a:t>0.56 + 3.4</a:t>
+                        <a:t>0,56 + 3,4</a:t>
                       </a:r>
                     </a:p>
                   </a:txBody>
@@ -9870,7 +9870,7 @@
                           <a:latin typeface="Arial" panose="020B0604020202020204" pitchFamily="34" charset="0"/>
                           <a:cs typeface="Arial" panose="020B0604020202020204" pitchFamily="34" charset="0"/>
                         </a:rPr>
-                        <a:t>6.2 + 0.84</a:t>
+                        <a:t>6,2 + 0,84</a:t>
                       </a:r>
                     </a:p>
                   </a:txBody>
@@ -9927,7 +9927,7 @@
                           <a:latin typeface="Arial" panose="020B0604020202020204" pitchFamily="34" charset="0"/>
                           <a:cs typeface="Arial" panose="020B0604020202020204" pitchFamily="34" charset="0"/>
                         </a:rPr>
-                        <a:t>3.7 + 2.45</a:t>
+                        <a:t>3,7 + 2,45</a:t>
                       </a:r>
                     </a:p>
                   </a:txBody>
@@ -9991,7 +9991,7 @@
                           <a:latin typeface="Arial" panose="020B0604020202020204" pitchFamily="34" charset="0"/>
                           <a:cs typeface="Arial" panose="020B0604020202020204" pitchFamily="34" charset="0"/>
                         </a:rPr>
-                        <a:t>3.4 + 0.51</a:t>
+                        <a:t>3,4 + 0,51</a:t>
                       </a:r>
                     </a:p>
                   </a:txBody>
@@ -10048,7 +10048,7 @@
                           <a:latin typeface="Arial" panose="020B0604020202020204" pitchFamily="34" charset="0"/>
                           <a:cs typeface="Arial" panose="020B0604020202020204" pitchFamily="34" charset="0"/>
                         </a:rPr>
-                        <a:t>3.1 + 1.26</a:t>
+                        <a:t>3,1 + 1,26</a:t>
                       </a:r>
                     </a:p>
                   </a:txBody>
@@ -10112,7 +10112,7 @@
                           <a:latin typeface="Arial" panose="020B0604020202020204" pitchFamily="34" charset="0"/>
                           <a:cs typeface="Arial" panose="020B0604020202020204" pitchFamily="34" charset="0"/>
                         </a:rPr>
-                        <a:t>2.01 + 1.6</a:t>
+                        <a:t>2,01 + 1,6</a:t>
                       </a:r>
                     </a:p>
                   </a:txBody>
@@ -10169,7 +10169,7 @@
                           <a:latin typeface="Arial" panose="020B0604020202020204" pitchFamily="34" charset="0"/>
                           <a:cs typeface="Arial" panose="020B0604020202020204" pitchFamily="34" charset="0"/>
                         </a:rPr>
-                        <a:t>1.8 + 2.67</a:t>
+                        <a:t>1,8 + 2,67</a:t>
                       </a:r>
                     </a:p>
                   </a:txBody>
@@ -10233,7 +10233,7 @@
                           <a:latin typeface="Arial" panose="020B0604020202020204" pitchFamily="34" charset="0"/>
                           <a:cs typeface="Arial" panose="020B0604020202020204" pitchFamily="34" charset="0"/>
                         </a:rPr>
-                        <a:t>2.2 + 1.72</a:t>
+                        <a:t>2,2 + 1,72</a:t>
                       </a:r>
                     </a:p>
                   </a:txBody>
@@ -10290,7 +10290,7 @@
                           <a:latin typeface="Arial" panose="020B0604020202020204" pitchFamily="34" charset="0"/>
                           <a:cs typeface="Arial" panose="020B0604020202020204" pitchFamily="34" charset="0"/>
                         </a:rPr>
-                        <a:t>4.7 + 3.23</a:t>
+                        <a:t>4,7 + 3,23</a:t>
                       </a:r>
                     </a:p>
                   </a:txBody>
@@ -10354,7 +10354,7 @@
                           <a:latin typeface="Arial" panose="020B0604020202020204" pitchFamily="34" charset="0"/>
                           <a:cs typeface="Arial" panose="020B0604020202020204" pitchFamily="34" charset="0"/>
                         </a:rPr>
-                        <a:t>4.91 + 1.3</a:t>
+                        <a:t>4,91 + 1,3</a:t>
                       </a:r>
                     </a:p>
                   </a:txBody>
@@ -10411,7 +10411,7 @@
                           <a:latin typeface="Arial" panose="020B0604020202020204" pitchFamily="34" charset="0"/>
                           <a:cs typeface="Arial" panose="020B0604020202020204" pitchFamily="34" charset="0"/>
                         </a:rPr>
-                        <a:t>4.8 + 2.26</a:t>
+                        <a:t>4,8 + 2,26</a:t>
                       </a:r>
                     </a:p>
                   </a:txBody>
